--- a/dist/초2/철학·논리·심리·교육·종교/이유와다른생각/초2_철학·논리·심리·교육·종교_이유와다른생각_01_서로다른이유.pptx
+++ b/dist/초2/철학·논리·심리·교육·종교/이유와다른생각/초2_철학·논리·심리·교육·종교_이유와다른생각_01_서로다른이유.pptx
@@ -119,45 +119,45 @@
   <p:extLst>
     <p:ext uri="{521415D9-36F7-43E2-AB2F-B90AF26B5E84}">
       <p14:sectionLst xmlns:p14="http://schemas.microsoft.com/office/powerpoint/2010/main">
-        <p14:section name="도입" id="{838142d8-51df-2426-d142-14e4610f9cc4}">
+        <p14:section name="도입" id="{7262e4e5-d66b-3746-ea7b-5871562186a2}">
           <p14:sldIdLst>
             <p14:sldId id="256"/>
             <p14:sldId id="257"/>
           </p14:sldIdLst>
         </p14:section>
-        <p14:section name="개념" id="{807b6430-2e9f-81cc-0780-d30a92f9acc4}">
+        <p14:section name="개념" id="{07e8846c-787d-1008-4a9a-9193a18e3613}">
           <p14:sldIdLst>
             <p14:sldId id="258"/>
             <p14:sldId id="259"/>
             <p14:sldId id="261"/>
           </p14:sldIdLst>
         </p14:section>
-        <p14:section name="연습" id="{a8ce4a3d-da79-1983-4423-315a507e64f2}">
+        <p14:section name="연습" id="{6d3253b3-9409-8375-0b7b-31ca5d5e1d86}">
           <p14:sldIdLst>
             <p14:sldId id="260"/>
             <p14:sldId id="262"/>
             <p14:sldId id="263"/>
           </p14:sldIdLst>
         </p14:section>
-        <p14:section name="개념" id="{18ccdce0-423c-31f4-2913-c713a18b8f03}">
+        <p14:section name="개념" id="{d05a9cc6-d2bb-a412-132c-b6898c6c8cb2}">
           <p14:sldIdLst/>
         </p14:section>
-        <p14:section name="연습" id="{cfc90683-8958-78fc-ac1e-925e19187006}">
+        <p14:section name="연습" id="{f7df6a4e-a499-c5bf-d1a9-757986801913}">
           <p14:sldIdLst/>
         </p14:section>
-        <p14:section name="확인" id="{e01c69a1-54b9-0a89-356e-2830f3fdf7c3}">
+        <p14:section name="확인" id="{b896eaf4-c3c6-4f8f-fd7d-1f2209f6e8b0}">
           <p14:sldIdLst>
             <p14:sldId id="264"/>
             <p14:sldId id="265"/>
             <p14:sldId id="266"/>
           </p14:sldIdLst>
         </p14:section>
-        <p14:section name="정리" id="{31bbc056-373a-17d1-b080-aa72dcf31de5}">
+        <p14:section name="정리" id="{9e4f3aff-eeda-11d5-da49-6dd7d8486a1b}">
           <p14:sldIdLst>
             <p14:sldId id="267"/>
           </p14:sldIdLst>
         </p14:section>
-        <p14:section name="보충" id="{7e1e532f-4aca-b785-76ca-31b5da162aea}">
+        <p14:section name="보충" id="{0ca1bd01-49f9-77e0-8b95-1edcaf4e63d8}">
           <p14:sldIdLst>
             <p14:sldId id="268"/>
           </p14:sldIdLst>
